--- a/bright-40-logo-lockups.pptx
+++ b/bright-40-logo-lockups.pptx
@@ -3088,20 +3088,12 @@
         <p:nvPr/>
       </p:nvGrpSpPr>
       <p:grpSpPr/>
-      <p:pic>
-        <p:nvPicPr>
-          <p:cNvPr id="2" name="Picture 1" descr="bright-40-logo-lockups.png"/>
-          <p:cNvPicPr>
-            <a:picLocks noChangeAspect="1"/>
-          </p:cNvPicPr>
+      <p:sp>
+        <p:nvSpPr>
+          <p:cNvPr id="2" name="Rectangle 1"/>
+          <p:cNvSpPr/>
           <p:nvPr/>
-        </p:nvPicPr>
-        <p:blipFill>
-          <a:blip r:embed="rId2"/>
-          <a:stretch>
-            <a:fillRect/>
-          </a:stretch>
-        </p:blipFill>
+        </p:nvSpPr>
         <p:spPr>
           <a:xfrm>
             <a:off x="0" y="0"/>
@@ -3110,8 +3102,719 @@
           <a:prstGeom prst="rect">
             <a:avLst/>
           </a:prstGeom>
+          <a:solidFill>
+            <a:srgbClr val="EDE7DD"/>
+          </a:solidFill>
+          <a:ln>
+            <a:noFill/>
+          </a:ln>
+          <a:effectLst/>
         </p:spPr>
-      </p:pic>
+        <p:style>
+          <a:lnRef idx="1">
+            <a:schemeClr val="accent1"/>
+          </a:lnRef>
+          <a:fillRef idx="3">
+            <a:schemeClr val="accent1"/>
+          </a:fillRef>
+          <a:effectRef idx="2">
+            <a:schemeClr val="accent1"/>
+          </a:effectRef>
+          <a:fontRef idx="minor">
+            <a:schemeClr val="lt1"/>
+          </a:fontRef>
+        </p:style>
+        <p:txBody>
+          <a:bodyPr rtlCol="0" anchor="ctr"/>
+          <a:lstStyle/>
+          <a:p>
+            <a:pPr algn="ctr"/>
+          </a:p>
+        </p:txBody>
+      </p:sp>
+      <p:sp>
+        <p:nvSpPr>
+          <p:cNvPr id="3" name="Rectangle 2"/>
+          <p:cNvSpPr/>
+          <p:nvPr/>
+        </p:nvSpPr>
+        <p:spPr>
+          <a:xfrm>
+            <a:off x="3660874" y="885825"/>
+            <a:ext cx="571500" cy="9525"/>
+          </a:xfrm>
+          <a:prstGeom prst="rect">
+            <a:avLst/>
+          </a:prstGeom>
+          <a:solidFill>
+            <a:srgbClr val="97A98C"/>
+          </a:solidFill>
+          <a:ln>
+            <a:noFill/>
+          </a:ln>
+          <a:effectLst/>
+        </p:spPr>
+        <p:style>
+          <a:lnRef idx="1">
+            <a:schemeClr val="accent1"/>
+          </a:lnRef>
+          <a:fillRef idx="3">
+            <a:schemeClr val="accent1"/>
+          </a:fillRef>
+          <a:effectRef idx="2">
+            <a:schemeClr val="accent1"/>
+          </a:effectRef>
+          <a:fontRef idx="minor">
+            <a:schemeClr val="lt1"/>
+          </a:fontRef>
+        </p:style>
+        <p:txBody>
+          <a:bodyPr rtlCol="0" anchor="ctr"/>
+          <a:lstStyle/>
+          <a:p>
+            <a:pPr algn="ctr"/>
+          </a:p>
+        </p:txBody>
+      </p:sp>
+      <p:sp>
+        <p:nvSpPr>
+          <p:cNvPr id="4" name="Rectangle 3"/>
+          <p:cNvSpPr/>
+          <p:nvPr/>
+        </p:nvSpPr>
+        <p:spPr>
+          <a:xfrm>
+            <a:off x="6054477" y="885825"/>
+            <a:ext cx="571500" cy="9525"/>
+          </a:xfrm>
+          <a:prstGeom prst="rect">
+            <a:avLst/>
+          </a:prstGeom>
+          <a:solidFill>
+            <a:srgbClr val="97A98C"/>
+          </a:solidFill>
+          <a:ln>
+            <a:noFill/>
+          </a:ln>
+          <a:effectLst/>
+        </p:spPr>
+        <p:style>
+          <a:lnRef idx="1">
+            <a:schemeClr val="accent1"/>
+          </a:lnRef>
+          <a:fillRef idx="3">
+            <a:schemeClr val="accent1"/>
+          </a:fillRef>
+          <a:effectRef idx="2">
+            <a:schemeClr val="accent1"/>
+          </a:effectRef>
+          <a:fontRef idx="minor">
+            <a:schemeClr val="lt1"/>
+          </a:fontRef>
+        </p:style>
+        <p:txBody>
+          <a:bodyPr rtlCol="0" anchor="ctr"/>
+          <a:lstStyle/>
+          <a:p>
+            <a:pPr algn="ctr"/>
+          </a:p>
+        </p:txBody>
+      </p:sp>
+      <p:sp>
+        <p:nvSpPr>
+          <p:cNvPr id="5" name="Oval 4"/>
+          <p:cNvSpPr/>
+          <p:nvPr/>
+        </p:nvSpPr>
+        <p:spPr>
+          <a:xfrm>
+            <a:off x="3562945" y="1905000"/>
+            <a:ext cx="704850" cy="704850"/>
+          </a:xfrm>
+          <a:prstGeom prst="ellipse">
+            <a:avLst/>
+          </a:prstGeom>
+          <a:noFill/>
+          <a:ln w="9525">
+            <a:solidFill>
+              <a:srgbClr val="97A98C"/>
+            </a:solidFill>
+          </a:ln>
+          <a:effectLst/>
+        </p:spPr>
+        <p:style>
+          <a:lnRef idx="1">
+            <a:schemeClr val="accent1"/>
+          </a:lnRef>
+          <a:fillRef idx="3">
+            <a:schemeClr val="accent1"/>
+          </a:fillRef>
+          <a:effectRef idx="2">
+            <a:schemeClr val="accent1"/>
+          </a:effectRef>
+          <a:fontRef idx="minor">
+            <a:schemeClr val="lt1"/>
+          </a:fontRef>
+        </p:style>
+        <p:txBody>
+          <a:bodyPr rtlCol="0" anchor="ctr"/>
+          <a:lstStyle/>
+          <a:p>
+            <a:pPr algn="ctr"/>
+          </a:p>
+        </p:txBody>
+      </p:sp>
+      <p:sp>
+        <p:nvSpPr>
+          <p:cNvPr id="6" name="Rectangle 5"/>
+          <p:cNvSpPr/>
+          <p:nvPr/>
+        </p:nvSpPr>
+        <p:spPr>
+          <a:xfrm>
+            <a:off x="3333750" y="3181350"/>
+            <a:ext cx="3619500" cy="9525"/>
+          </a:xfrm>
+          <a:prstGeom prst="rect">
+            <a:avLst/>
+          </a:prstGeom>
+          <a:solidFill>
+            <a:srgbClr val="C2C8B4"/>
+          </a:solidFill>
+          <a:ln>
+            <a:noFill/>
+          </a:ln>
+          <a:effectLst/>
+        </p:spPr>
+        <p:style>
+          <a:lnRef idx="1">
+            <a:schemeClr val="accent1"/>
+          </a:lnRef>
+          <a:fillRef idx="3">
+            <a:schemeClr val="accent1"/>
+          </a:fillRef>
+          <a:effectRef idx="2">
+            <a:schemeClr val="accent1"/>
+          </a:effectRef>
+          <a:fontRef idx="minor">
+            <a:schemeClr val="lt1"/>
+          </a:fontRef>
+        </p:style>
+        <p:txBody>
+          <a:bodyPr rtlCol="0" anchor="ctr"/>
+          <a:lstStyle/>
+          <a:p>
+            <a:pPr algn="ctr"/>
+          </a:p>
+        </p:txBody>
+      </p:sp>
+      <p:sp>
+        <p:nvSpPr>
+          <p:cNvPr id="7" name="Rectangle 6"/>
+          <p:cNvSpPr/>
+          <p:nvPr/>
+        </p:nvSpPr>
+        <p:spPr>
+          <a:xfrm>
+            <a:off x="3333750" y="5286375"/>
+            <a:ext cx="3619500" cy="9525"/>
+          </a:xfrm>
+          <a:prstGeom prst="rect">
+            <a:avLst/>
+          </a:prstGeom>
+          <a:solidFill>
+            <a:srgbClr val="C2C8B4"/>
+          </a:solidFill>
+          <a:ln>
+            <a:noFill/>
+          </a:ln>
+          <a:effectLst/>
+        </p:spPr>
+        <p:style>
+          <a:lnRef idx="1">
+            <a:schemeClr val="accent1"/>
+          </a:lnRef>
+          <a:fillRef idx="3">
+            <a:schemeClr val="accent1"/>
+          </a:fillRef>
+          <a:effectRef idx="2">
+            <a:schemeClr val="accent1"/>
+          </a:effectRef>
+          <a:fontRef idx="minor">
+            <a:schemeClr val="lt1"/>
+          </a:fontRef>
+        </p:style>
+        <p:txBody>
+          <a:bodyPr rtlCol="0" anchor="ctr"/>
+          <a:lstStyle/>
+          <a:p>
+            <a:pPr algn="ctr"/>
+          </a:p>
+        </p:txBody>
+      </p:sp>
+      <p:sp>
+        <p:nvSpPr>
+          <p:cNvPr id="8" name="Oval 7"/>
+          <p:cNvSpPr/>
+          <p:nvPr/>
+        </p:nvSpPr>
+        <p:spPr>
+          <a:xfrm>
+            <a:off x="2933700" y="5872162"/>
+            <a:ext cx="1047750" cy="1047750"/>
+          </a:xfrm>
+          <a:prstGeom prst="ellipse">
+            <a:avLst/>
+          </a:prstGeom>
+          <a:noFill/>
+          <a:ln w="9525">
+            <a:solidFill>
+              <a:srgbClr val="97A98C"/>
+            </a:solidFill>
+          </a:ln>
+          <a:effectLst/>
+        </p:spPr>
+        <p:style>
+          <a:lnRef idx="1">
+            <a:schemeClr val="accent1"/>
+          </a:lnRef>
+          <a:fillRef idx="3">
+            <a:schemeClr val="accent1"/>
+          </a:fillRef>
+          <a:effectRef idx="2">
+            <a:schemeClr val="accent1"/>
+          </a:effectRef>
+          <a:fontRef idx="minor">
+            <a:schemeClr val="lt1"/>
+          </a:fontRef>
+        </p:style>
+        <p:txBody>
+          <a:bodyPr rtlCol="0" anchor="ctr"/>
+          <a:lstStyle/>
+          <a:p>
+            <a:pPr algn="ctr"/>
+          </a:p>
+        </p:txBody>
+      </p:sp>
+      <p:sp>
+        <p:nvSpPr>
+          <p:cNvPr id="9" name="Oval 8"/>
+          <p:cNvSpPr/>
+          <p:nvPr/>
+        </p:nvSpPr>
+        <p:spPr>
+          <a:xfrm>
+            <a:off x="4457700" y="5872162"/>
+            <a:ext cx="1047750" cy="1047750"/>
+          </a:xfrm>
+          <a:prstGeom prst="ellipse">
+            <a:avLst/>
+          </a:prstGeom>
+          <a:solidFill>
+            <a:srgbClr val="97A98C"/>
+          </a:solidFill>
+          <a:ln>
+            <a:noFill/>
+          </a:ln>
+          <a:effectLst/>
+        </p:spPr>
+        <p:style>
+          <a:lnRef idx="1">
+            <a:schemeClr val="accent1"/>
+          </a:lnRef>
+          <a:fillRef idx="3">
+            <a:schemeClr val="accent1"/>
+          </a:fillRef>
+          <a:effectRef idx="2">
+            <a:schemeClr val="accent1"/>
+          </a:effectRef>
+          <a:fontRef idx="minor">
+            <a:schemeClr val="lt1"/>
+          </a:fontRef>
+        </p:style>
+        <p:txBody>
+          <a:bodyPr rtlCol="0" anchor="ctr"/>
+          <a:lstStyle/>
+          <a:p>
+            <a:pPr algn="ctr"/>
+          </a:p>
+        </p:txBody>
+      </p:sp>
+      <p:sp>
+        <p:nvSpPr>
+          <p:cNvPr id="10" name="Oval 9"/>
+          <p:cNvSpPr/>
+          <p:nvPr/>
+        </p:nvSpPr>
+        <p:spPr>
+          <a:xfrm>
+            <a:off x="4457700" y="5872162"/>
+            <a:ext cx="1047750" cy="1047750"/>
+          </a:xfrm>
+          <a:prstGeom prst="ellipse">
+            <a:avLst/>
+          </a:prstGeom>
+          <a:noFill/>
+          <a:ln w="9525">
+            <a:solidFill>
+              <a:srgbClr val="97A98C"/>
+            </a:solidFill>
+          </a:ln>
+          <a:effectLst/>
+        </p:spPr>
+        <p:style>
+          <a:lnRef idx="1">
+            <a:schemeClr val="accent1"/>
+          </a:lnRef>
+          <a:fillRef idx="3">
+            <a:schemeClr val="accent1"/>
+          </a:fillRef>
+          <a:effectRef idx="2">
+            <a:schemeClr val="accent1"/>
+          </a:effectRef>
+          <a:fontRef idx="minor">
+            <a:schemeClr val="lt1"/>
+          </a:fontRef>
+        </p:style>
+        <p:txBody>
+          <a:bodyPr rtlCol="0" anchor="ctr"/>
+          <a:lstStyle/>
+          <a:p>
+            <a:pPr algn="ctr"/>
+          </a:p>
+        </p:txBody>
+      </p:sp>
+      <p:sp>
+        <p:nvSpPr>
+          <p:cNvPr id="11" name="TextBox 10"/>
+          <p:cNvSpPr txBox="1"/>
+          <p:nvPr/>
+        </p:nvSpPr>
+        <p:spPr>
+          <a:xfrm>
+            <a:off x="3800043" y="804862"/>
+            <a:ext cx="2686764" cy="171450"/>
+          </a:xfrm>
+          <a:prstGeom prst="rect">
+            <a:avLst/>
+          </a:prstGeom>
+          <a:noFill/>
+        </p:spPr>
+        <p:txBody>
+          <a:bodyPr wrap="none" anchor="t" lIns="0" rIns="0" tIns="0" bIns="0"/>
+          <a:lstStyle/>
+          <a:p>
+            <a:pPr algn="ctr"/>
+            <a:r>
+              <a:rPr sz="900" i="0" b="0" spc="378">
+                <a:solidFill>
+                  <a:srgbClr val="97A98C"/>
+                </a:solidFill>
+                <a:latin typeface="Poppins"/>
+                <a:ea typeface="Poppins"/>
+                <a:cs typeface="Poppins"/>
+              </a:rPr>
+              <a:t>LOGO LOCKUPS</a:t>
+            </a:r>
+          </a:p>
+        </p:txBody>
+      </p:sp>
+      <p:sp>
+        <p:nvSpPr>
+          <p:cNvPr id="12" name="TextBox 11"/>
+          <p:cNvSpPr txBox="1"/>
+          <p:nvPr/>
+        </p:nvSpPr>
+        <p:spPr>
+          <a:xfrm>
+            <a:off x="3686770" y="2105025"/>
+            <a:ext cx="1112520" cy="304800"/>
+          </a:xfrm>
+          <a:prstGeom prst="rect">
+            <a:avLst/>
+          </a:prstGeom>
+          <a:noFill/>
+        </p:spPr>
+        <p:txBody>
+          <a:bodyPr wrap="none" anchor="t" lIns="0" rIns="0" tIns="0" bIns="0"/>
+          <a:lstStyle/>
+          <a:p>
+            <a:pPr algn="l">
+              <a:lnSpc>
+                <a:spcPct val="100000"/>
+              </a:lnSpc>
+            </a:pPr>
+            <a:r>
+              <a:rPr sz="2400" i="0" b="0">
+                <a:solidFill>
+                  <a:srgbClr val="97A98C"/>
+                </a:solidFill>
+                <a:latin typeface="Cormorant Garamond"/>
+                <a:ea typeface="Cormorant Garamond"/>
+                <a:cs typeface="Cormorant Garamond"/>
+              </a:rPr>
+              <a:t>ME</a:t>
+            </a:r>
+          </a:p>
+        </p:txBody>
+      </p:sp>
+      <p:sp>
+        <p:nvSpPr>
+          <p:cNvPr id="13" name="TextBox 12"/>
+          <p:cNvSpPr txBox="1"/>
+          <p:nvPr/>
+        </p:nvSpPr>
+        <p:spPr>
+          <a:xfrm>
+            <a:off x="4477345" y="1957388"/>
+            <a:ext cx="3975497" cy="419100"/>
+          </a:xfrm>
+          <a:prstGeom prst="rect">
+            <a:avLst/>
+          </a:prstGeom>
+          <a:noFill/>
+        </p:spPr>
+        <p:txBody>
+          <a:bodyPr wrap="none" anchor="t" lIns="0" rIns="0" tIns="0" bIns="0"/>
+          <a:lstStyle/>
+          <a:p>
+            <a:pPr algn="l">
+              <a:lnSpc>
+                <a:spcPct val="100000"/>
+              </a:lnSpc>
+            </a:pPr>
+            <a:r>
+              <a:rPr sz="3300" i="0" b="0">
+                <a:solidFill>
+                  <a:srgbClr val="33322E"/>
+                </a:solidFill>
+                <a:latin typeface="Cormorant Garamond"/>
+                <a:ea typeface="Cormorant Garamond"/>
+                <a:cs typeface="Cormorant Garamond"/>
+              </a:rPr>
+              <a:t>Maya Ellison</a:t>
+            </a:r>
+          </a:p>
+        </p:txBody>
+      </p:sp>
+      <p:sp>
+        <p:nvSpPr>
+          <p:cNvPr id="14" name="TextBox 13"/>
+          <p:cNvSpPr txBox="1"/>
+          <p:nvPr/>
+        </p:nvSpPr>
+        <p:spPr>
+          <a:xfrm>
+            <a:off x="4477345" y="2433638"/>
+            <a:ext cx="3975497" cy="123825"/>
+          </a:xfrm>
+          <a:prstGeom prst="rect">
+            <a:avLst/>
+          </a:prstGeom>
+          <a:noFill/>
+        </p:spPr>
+        <p:txBody>
+          <a:bodyPr wrap="none" anchor="t" lIns="0" rIns="0" tIns="0" bIns="0"/>
+          <a:lstStyle/>
+          <a:p>
+            <a:pPr algn="l"/>
+            <a:r>
+              <a:rPr sz="675" i="0" b="0" spc="229">
+                <a:solidFill>
+                  <a:srgbClr val="8A867E"/>
+                </a:solidFill>
+                <a:latin typeface="Poppins"/>
+                <a:ea typeface="Poppins"/>
+                <a:cs typeface="Poppins"/>
+              </a:rPr>
+              <a:t>REALTOR®  |  MODERN LIVING</a:t>
+            </a:r>
+          </a:p>
+        </p:txBody>
+      </p:sp>
+      <p:sp>
+        <p:nvSpPr>
+          <p:cNvPr id="15" name="TextBox 14"/>
+          <p:cNvSpPr txBox="1"/>
+          <p:nvPr/>
+        </p:nvSpPr>
+        <p:spPr>
+          <a:xfrm>
+            <a:off x="2338864" y="3762375"/>
+            <a:ext cx="5609272" cy="704850"/>
+          </a:xfrm>
+          <a:prstGeom prst="rect">
+            <a:avLst/>
+          </a:prstGeom>
+          <a:noFill/>
+        </p:spPr>
+        <p:txBody>
+          <a:bodyPr wrap="none" anchor="t" lIns="0" rIns="0" tIns="0" bIns="0"/>
+          <a:lstStyle/>
+          <a:p>
+            <a:pPr algn="ctr"/>
+            <a:r>
+              <a:rPr sz="4800" i="1" b="0">
+                <a:solidFill>
+                  <a:srgbClr val="33322E"/>
+                </a:solidFill>
+                <a:latin typeface="Cormorant Garamond"/>
+                <a:ea typeface="Cormorant Garamond"/>
+                <a:cs typeface="Cormorant Garamond"/>
+              </a:rPr>
+              <a:t>Maya Ellison</a:t>
+            </a:r>
+          </a:p>
+        </p:txBody>
+      </p:sp>
+      <p:sp>
+        <p:nvSpPr>
+          <p:cNvPr id="16" name="TextBox 15"/>
+          <p:cNvSpPr txBox="1"/>
+          <p:nvPr/>
+        </p:nvSpPr>
+        <p:spPr>
+          <a:xfrm>
+            <a:off x="2338864" y="4562475"/>
+            <a:ext cx="5609272" cy="152400"/>
+          </a:xfrm>
+          <a:prstGeom prst="rect">
+            <a:avLst/>
+          </a:prstGeom>
+          <a:noFill/>
+        </p:spPr>
+        <p:txBody>
+          <a:bodyPr wrap="none" anchor="t" lIns="0" rIns="0" tIns="0" bIns="0"/>
+          <a:lstStyle/>
+          <a:p>
+            <a:pPr algn="ctr"/>
+            <a:r>
+              <a:rPr sz="750" i="0" b="0" spc="300">
+                <a:solidFill>
+                  <a:srgbClr val="97A98C"/>
+                </a:solidFill>
+                <a:latin typeface="Poppins"/>
+                <a:ea typeface="Poppins"/>
+                <a:cs typeface="Poppins"/>
+              </a:rPr>
+              <a:t>MODERN LIVING · AUSTIN</a:t>
+            </a:r>
+          </a:p>
+        </p:txBody>
+      </p:sp>
+      <p:sp>
+        <p:nvSpPr>
+          <p:cNvPr id="17" name="TextBox 16"/>
+          <p:cNvSpPr txBox="1"/>
+          <p:nvPr/>
+        </p:nvSpPr>
+        <p:spPr>
+          <a:xfrm>
+            <a:off x="3114675" y="6167438"/>
+            <a:ext cx="1478280" cy="457200"/>
+          </a:xfrm>
+          <a:prstGeom prst="rect">
+            <a:avLst/>
+          </a:prstGeom>
+          <a:noFill/>
+        </p:spPr>
+        <p:txBody>
+          <a:bodyPr wrap="none" anchor="t" lIns="0" rIns="0" tIns="0" bIns="0"/>
+          <a:lstStyle/>
+          <a:p>
+            <a:pPr algn="l">
+              <a:lnSpc>
+                <a:spcPct val="100000"/>
+              </a:lnSpc>
+            </a:pPr>
+            <a:r>
+              <a:rPr sz="3600" i="0" b="0">
+                <a:solidFill>
+                  <a:srgbClr val="97A98C"/>
+                </a:solidFill>
+                <a:latin typeface="Cormorant Garamond"/>
+                <a:ea typeface="Cormorant Garamond"/>
+                <a:cs typeface="Cormorant Garamond"/>
+              </a:rPr>
+              <a:t>ME</a:t>
+            </a:r>
+          </a:p>
+        </p:txBody>
+      </p:sp>
+      <p:sp>
+        <p:nvSpPr>
+          <p:cNvPr id="18" name="TextBox 17"/>
+          <p:cNvSpPr txBox="1"/>
+          <p:nvPr/>
+        </p:nvSpPr>
+        <p:spPr>
+          <a:xfrm>
+            <a:off x="4638675" y="6167438"/>
+            <a:ext cx="1478280" cy="457200"/>
+          </a:xfrm>
+          <a:prstGeom prst="rect">
+            <a:avLst/>
+          </a:prstGeom>
+          <a:noFill/>
+        </p:spPr>
+        <p:txBody>
+          <a:bodyPr wrap="none" anchor="t" lIns="0" rIns="0" tIns="0" bIns="0"/>
+          <a:lstStyle/>
+          <a:p>
+            <a:pPr algn="l">
+              <a:lnSpc>
+                <a:spcPct val="100000"/>
+              </a:lnSpc>
+            </a:pPr>
+            <a:r>
+              <a:rPr sz="3600" i="0" b="0">
+                <a:solidFill>
+                  <a:srgbClr val="FBFAF7"/>
+                </a:solidFill>
+                <a:latin typeface="Cormorant Garamond"/>
+                <a:ea typeface="Cormorant Garamond"/>
+                <a:cs typeface="Cormorant Garamond"/>
+              </a:rPr>
+              <a:t>ME</a:t>
+            </a:r>
+          </a:p>
+        </p:txBody>
+      </p:sp>
+      <p:sp>
+        <p:nvSpPr>
+          <p:cNvPr id="19" name="TextBox 18"/>
+          <p:cNvSpPr txBox="1"/>
+          <p:nvPr/>
+        </p:nvSpPr>
+        <p:spPr>
+          <a:xfrm>
+            <a:off x="5981700" y="5867400"/>
+            <a:ext cx="2575560" cy="1057275"/>
+          </a:xfrm>
+          <a:prstGeom prst="rect">
+            <a:avLst/>
+          </a:prstGeom>
+          <a:noFill/>
+        </p:spPr>
+        <p:txBody>
+          <a:bodyPr wrap="none" anchor="t" lIns="0" rIns="0" tIns="0" bIns="0"/>
+          <a:lstStyle/>
+          <a:p>
+            <a:pPr algn="l"/>
+            <a:r>
+              <a:rPr sz="7200" i="0" b="0">
+                <a:solidFill>
+                  <a:srgbClr val="97A98C"/>
+                </a:solidFill>
+                <a:latin typeface="Cormorant Garamond"/>
+                <a:ea typeface="Cormorant Garamond"/>
+                <a:cs typeface="Cormorant Garamond"/>
+              </a:rPr>
+              <a:t>ME</a:t>
+            </a:r>
+          </a:p>
+        </p:txBody>
+      </p:sp>
     </p:spTree>
   </p:cSld>
   <p:clrMapOvr>
